--- a/static/teaching/Lecture06AMalthus.pptx
+++ b/static/teaching/Lecture06AMalthus.pptx
@@ -5494,7 +5494,7 @@
             <a:fld id="{A7FF0F53-BCF4-4196-884A-18FF58049426}" type="datetimeFigureOut">
               <a:rPr lang="en-US" smtClean="0"/>
               <a:pPr/>
-              <a:t>10/7/2025</a:t>
+              <a:t>10/18/2026</a:t>
             </a:fld>
             <a:endParaRPr lang="en-US"/>
           </a:p>
@@ -5661,7 +5661,7 @@
             <a:fld id="{F7E76360-57E1-4B0E-87A9-296A929A8907}" type="datetimeFigureOut">
               <a:rPr lang="en-US" smtClean="0"/>
               <a:pPr/>
-              <a:t>10/7/2025</a:t>
+              <a:t>10/18/2026</a:t>
             </a:fld>
             <a:endParaRPr lang="en-US" dirty="0"/>
           </a:p>
@@ -6162,14 +6162,6 @@
           <a:bodyPr/>
           <a:lstStyle/>
           <a:p>
-            <a:r>
-              <a:rPr lang="en-US" dirty="0"/>
-              <a:t>This</a:t>
-            </a:r>
-            <a:r>
-              <a:rPr lang="en-US" baseline="0" dirty="0"/>
-              <a:t> basic idea was evident in the writings of Smith and Ricardo as well (see Wrigley). But Malthus’ work focused on it and it is primarily associated with Malthus today.</a:t>
-            </a:r>
             <a:endParaRPr lang="en-US" dirty="0"/>
           </a:p>
         </p:txBody>
@@ -6751,7 +6743,7 @@
             <a:fld id="{C4EA03FD-C67F-44EF-A8F9-56FF0B367A6C}" type="datetime1">
               <a:rPr lang="en-US" smtClean="0"/>
               <a:pPr/>
-              <a:t>10/7/2025</a:t>
+              <a:t>10/18/2026</a:t>
             </a:fld>
             <a:endParaRPr lang="en-US" dirty="0"/>
           </a:p>
@@ -6916,7 +6908,7 @@
             <a:fld id="{3BF0F1A6-3A8D-4565-86E3-8913882C1F6C}" type="datetime1">
               <a:rPr lang="en-US" smtClean="0"/>
               <a:pPr/>
-              <a:t>10/7/2025</a:t>
+              <a:t>10/18/2026</a:t>
             </a:fld>
             <a:endParaRPr lang="en-US" dirty="0"/>
           </a:p>
@@ -7091,7 +7083,7 @@
             <a:fld id="{61D867AB-0E6F-4543-A665-7C7F72158182}" type="datetime1">
               <a:rPr lang="en-US" smtClean="0"/>
               <a:pPr/>
-              <a:t>10/7/2025</a:t>
+              <a:t>10/18/2026</a:t>
             </a:fld>
             <a:endParaRPr lang="en-US" dirty="0"/>
           </a:p>
@@ -7256,7 +7248,7 @@
             <a:fld id="{B6A084AF-0BCE-450F-BE5F-6AABCAE9B5ED}" type="datetime1">
               <a:rPr lang="en-US" smtClean="0"/>
               <a:pPr/>
-              <a:t>10/7/2025</a:t>
+              <a:t>10/18/2026</a:t>
             </a:fld>
             <a:endParaRPr lang="en-US" dirty="0"/>
           </a:p>
@@ -7498,7 +7490,7 @@
             <a:fld id="{D54C08E1-385D-4BFA-91E2-333DE7CF1AB1}" type="datetime1">
               <a:rPr lang="en-US" smtClean="0"/>
               <a:pPr/>
-              <a:t>10/7/2025</a:t>
+              <a:t>10/18/2026</a:t>
             </a:fld>
             <a:endParaRPr lang="en-US" dirty="0"/>
           </a:p>
@@ -7780,7 +7772,7 @@
             <a:fld id="{0088EEF8-3B87-41F7-8411-93F355D12445}" type="datetime1">
               <a:rPr lang="en-US" smtClean="0"/>
               <a:pPr/>
-              <a:t>10/7/2025</a:t>
+              <a:t>10/18/2026</a:t>
             </a:fld>
             <a:endParaRPr lang="en-US" dirty="0"/>
           </a:p>
@@ -8196,7 +8188,7 @@
             <a:fld id="{66EAE108-E25A-40A5-9FEA-CC765BB77D74}" type="datetime1">
               <a:rPr lang="en-US" smtClean="0"/>
               <a:pPr/>
-              <a:t>10/7/2025</a:t>
+              <a:t>10/18/2026</a:t>
             </a:fld>
             <a:endParaRPr lang="en-US" dirty="0"/>
           </a:p>
@@ -8310,7 +8302,7 @@
             <a:fld id="{345EA762-282D-46D6-A665-1E5AF14DF859}" type="datetime1">
               <a:rPr lang="en-US" smtClean="0"/>
               <a:pPr/>
-              <a:t>10/7/2025</a:t>
+              <a:t>10/18/2026</a:t>
             </a:fld>
             <a:endParaRPr lang="en-US" dirty="0"/>
           </a:p>
@@ -8402,7 +8394,7 @@
             <a:fld id="{9AB30DB0-7167-4C84-A3BD-8E01D1EC7EA1}" type="datetime1">
               <a:rPr lang="en-US" smtClean="0"/>
               <a:pPr/>
-              <a:t>10/7/2025</a:t>
+              <a:t>10/18/2026</a:t>
             </a:fld>
             <a:endParaRPr lang="en-US" dirty="0"/>
           </a:p>
@@ -8674,7 +8666,7 @@
             <a:fld id="{EBD714A7-F110-4362-98E6-60E02A1C4F9E}" type="datetime1">
               <a:rPr lang="en-US" smtClean="0"/>
               <a:pPr/>
-              <a:t>10/7/2025</a:t>
+              <a:t>10/18/2026</a:t>
             </a:fld>
             <a:endParaRPr lang="en-US" dirty="0"/>
           </a:p>
@@ -8923,7 +8915,7 @@
             <a:fld id="{3A9305B5-97DA-4C63-969E-196EC790B789}" type="datetime1">
               <a:rPr lang="en-US" smtClean="0"/>
               <a:pPr/>
-              <a:t>10/7/2025</a:t>
+              <a:t>10/18/2026</a:t>
             </a:fld>
             <a:endParaRPr lang="en-US" dirty="0"/>
           </a:p>
@@ -9131,7 +9123,7 @@
             <a:fld id="{6BE33B1C-9997-4111-87C9-795743AD8967}" type="datetime1">
               <a:rPr lang="en-US" smtClean="0"/>
               <a:pPr/>
-              <a:t>10/7/2025</a:t>
+              <a:t>10/18/2026</a:t>
             </a:fld>
             <a:endParaRPr lang="en-US" dirty="0"/>
           </a:p>
@@ -9704,15 +9696,12 @@
                 </a:pPr>
                 <a14:m>
                   <m:oMathPara xmlns:m="http://schemas.openxmlformats.org/officeDocument/2006/math">
-                    <m:oMathParaPr>
-                      <m:jc m:val="centerGroup"/>
-                    </m:oMathParaPr>
-                    <m:oMath xmlns:m="http://schemas.openxmlformats.org/officeDocument/2006/math">
+                    <m:oMath>
                       <m:sSub>
                         <m:sSubPr>
                           <m:ctrlPr>
                             <a:rPr lang="en-US" i="1">
-                              <a:latin typeface="Cambria Math" panose="02040503050406030204" pitchFamily="18" charset="0"/>
+                              <a:latin typeface="Cambria Math"/>
                             </a:rPr>
                           </m:ctrlPr>
                         </m:sSubPr>
@@ -9758,7 +9747,7 @@
                             <m:sSubPr>
                               <m:ctrlPr>
                                 <a:rPr lang="en-US" i="1">
-                                  <a:latin typeface="Cambria Math" panose="02040503050406030204" pitchFamily="18" charset="0"/>
+                                  <a:latin typeface="Cambria Math"/>
                                 </a:rPr>
                               </m:ctrlPr>
                             </m:sSubPr>
@@ -9785,7 +9774,7 @@
                             <m:sSupPr>
                               <m:ctrlPr>
                                 <a:rPr lang="en-US" i="1">
-                                  <a:latin typeface="Cambria Math" panose="02040503050406030204" pitchFamily="18" charset="0"/>
+                                  <a:latin typeface="Cambria Math"/>
                                 </a:rPr>
                               </m:ctrlPr>
                             </m:sSupPr>
@@ -9812,7 +9801,7 @@
                         <m:sSubPr>
                           <m:ctrlPr>
                             <a:rPr lang="en-US" i="1">
-                              <a:latin typeface="Cambria Math" panose="02040503050406030204" pitchFamily="18" charset="0"/>
+                              <a:latin typeface="Cambria Math"/>
                             </a:rPr>
                           </m:ctrlPr>
                         </m:sSubPr>
@@ -9846,7 +9835,7 @@
                       <m:sSupPr>
                         <m:ctrlPr>
                           <a:rPr lang="en-US" i="1">
-                            <a:latin typeface="Cambria Math" panose="02040503050406030204" pitchFamily="18" charset="0"/>
+                            <a:latin typeface="Cambria Math"/>
                           </a:rPr>
                         </m:ctrlPr>
                       </m:sSupPr>
@@ -10375,15 +10364,12 @@
                 </a:pPr>
                 <a14:m>
                   <m:oMathPara xmlns:m="http://schemas.openxmlformats.org/officeDocument/2006/math">
-                    <m:oMathParaPr>
-                      <m:jc m:val="centerGroup"/>
-                    </m:oMathParaPr>
-                    <m:oMath xmlns:m="http://schemas.openxmlformats.org/officeDocument/2006/math">
+                    <m:oMath>
                       <m:sSub>
                         <m:sSubPr>
                           <m:ctrlPr>
                             <a:rPr lang="en-US" i="1">
-                              <a:latin typeface="Cambria Math" panose="02040503050406030204" pitchFamily="18" charset="0"/>
+                              <a:latin typeface="Cambria Math"/>
                             </a:rPr>
                           </m:ctrlPr>
                         </m:sSubPr>
@@ -10429,7 +10415,7 @@
                             <m:sSubPr>
                               <m:ctrlPr>
                                 <a:rPr lang="en-US" i="1">
-                                  <a:latin typeface="Cambria Math" panose="02040503050406030204" pitchFamily="18" charset="0"/>
+                                  <a:latin typeface="Cambria Math"/>
                                 </a:rPr>
                               </m:ctrlPr>
                             </m:sSubPr>
@@ -10456,7 +10442,7 @@
                             <m:sSupPr>
                               <m:ctrlPr>
                                 <a:rPr lang="en-US" i="1">
-                                  <a:latin typeface="Cambria Math" panose="02040503050406030204" pitchFamily="18" charset="0"/>
+                                  <a:latin typeface="Cambria Math"/>
                                 </a:rPr>
                               </m:ctrlPr>
                             </m:sSupPr>
@@ -10483,7 +10469,7 @@
                         <m:sSubPr>
                           <m:ctrlPr>
                             <a:rPr lang="en-US" i="1">
-                              <a:latin typeface="Cambria Math" panose="02040503050406030204" pitchFamily="18" charset="0"/>
+                              <a:latin typeface="Cambria Math"/>
                             </a:rPr>
                           </m:ctrlPr>
                         </m:sSubPr>
@@ -10513,7 +10499,7 @@
                       <m:f>
                         <m:fPr>
                           <m:ctrlPr>
-                            <a:rPr lang="en-US" i="1" smtClean="0">
+                            <a:rPr lang="en-US" i="1">
                               <a:latin typeface="Cambria Math" panose="02040503050406030204" pitchFamily="18" charset="0"/>
                             </a:rPr>
                           </m:ctrlPr>
@@ -10523,7 +10509,7 @@
                             <m:sSubPr>
                               <m:ctrlPr>
                                 <a:rPr lang="en-US" i="1">
-                                  <a:latin typeface="Cambria Math" panose="02040503050406030204" pitchFamily="18" charset="0"/>
+                                  <a:latin typeface="Cambria Math"/>
                                 </a:rPr>
                               </m:ctrlPr>
                             </m:sSubPr>
@@ -10556,7 +10542,7 @@
                             <m:sSubPr>
                               <m:ctrlPr>
                                 <a:rPr lang="en-US" i="1">
-                                  <a:latin typeface="Cambria Math" panose="02040503050406030204" pitchFamily="18" charset="0"/>
+                                  <a:latin typeface="Cambria Math"/>
                                 </a:rPr>
                               </m:ctrlPr>
                             </m:sSubPr>
@@ -10598,7 +10584,7 @@
                             <m:sSubPr>
                               <m:ctrlPr>
                                 <a:rPr lang="en-US" i="1">
-                                  <a:latin typeface="Cambria Math" panose="02040503050406030204" pitchFamily="18" charset="0"/>
+                                  <a:latin typeface="Cambria Math"/>
                                 </a:rPr>
                               </m:ctrlPr>
                             </m:sSubPr>
@@ -10625,7 +10611,7 @@
                             <m:sSupPr>
                               <m:ctrlPr>
                                 <a:rPr lang="en-US" i="1">
-                                  <a:latin typeface="Cambria Math" panose="02040503050406030204" pitchFamily="18" charset="0"/>
+                                  <a:latin typeface="Cambria Math"/>
                                 </a:rPr>
                               </m:ctrlPr>
                             </m:sSupPr>
@@ -10670,7 +10656,7 @@
                     <m:sSub>
                       <m:sSubPr>
                         <m:ctrlPr>
-                          <a:rPr lang="en-US" i="1" smtClean="0">
+                          <a:rPr lang="en-US" b="0" i="1" smtClean="0">
                             <a:latin typeface="Cambria Math" panose="02040503050406030204" pitchFamily="18" charset="0"/>
                           </a:rPr>
                         </m:ctrlPr>
@@ -10977,7 +10963,8 @@
                       <m:sSubPr>
                         <m:ctrlPr>
                           <a:rPr lang="en-US" i="1">
-                            <a:latin typeface="Cambria Math" panose="02040503050406030204" pitchFamily="18" charset="0"/>
+                            <a:latin typeface="Cambria Math"/>
+                            <a:ea typeface="Cambria Math"/>
                           </a:rPr>
                         </m:ctrlPr>
                       </m:sSubPr>
@@ -11015,10 +11002,7 @@
                 </a:pPr>
                 <a14:m>
                   <m:oMathPara xmlns:m="http://schemas.openxmlformats.org/officeDocument/2006/math">
-                    <m:oMathParaPr>
-                      <m:jc m:val="centerGroup"/>
-                    </m:oMathParaPr>
-                    <m:oMath xmlns:m="http://schemas.openxmlformats.org/officeDocument/2006/math">
+                    <m:oMath>
                       <m:f>
                         <m:fPr>
                           <m:ctrlPr>
@@ -11032,7 +11016,7 @@
                             <m:sSubPr>
                               <m:ctrlPr>
                                 <a:rPr lang="en-US" i="1">
-                                  <a:latin typeface="Cambria Math" panose="02040503050406030204" pitchFamily="18" charset="0"/>
+                                  <a:latin typeface="Cambria Math"/>
                                 </a:rPr>
                               </m:ctrlPr>
                             </m:sSubPr>
@@ -11065,7 +11049,7 @@
                             <m:sSubPr>
                               <m:ctrlPr>
                                 <a:rPr lang="en-US" i="1">
-                                  <a:latin typeface="Cambria Math" panose="02040503050406030204" pitchFamily="18" charset="0"/>
+                                  <a:latin typeface="Cambria Math"/>
                                 </a:rPr>
                               </m:ctrlPr>
                             </m:sSubPr>
@@ -11097,7 +11081,7 @@
                       <m:d>
                         <m:dPr>
                           <m:ctrlPr>
-                            <a:rPr lang="en-US" i="1" smtClean="0">
+                            <a:rPr lang="en-US" i="1">
                               <a:latin typeface="Cambria Math" panose="02040503050406030204" pitchFamily="18" charset="0"/>
                             </a:rPr>
                           </m:ctrlPr>
@@ -11116,7 +11100,7 @@
                                 <m:sSubPr>
                                   <m:ctrlPr>
                                     <a:rPr lang="en-US" i="1">
-                                      <a:latin typeface="Cambria Math" panose="02040503050406030204" pitchFamily="18" charset="0"/>
+                                      <a:latin typeface="Cambria Math"/>
                                     </a:rPr>
                                   </m:ctrlPr>
                                 </m:sSubPr>
@@ -11143,7 +11127,7 @@
                                 <m:sSupPr>
                                   <m:ctrlPr>
                                     <a:rPr lang="en-US" i="1">
-                                      <a:latin typeface="Cambria Math" panose="02040503050406030204" pitchFamily="18" charset="0"/>
+                                      <a:latin typeface="Cambria Math"/>
                                     </a:rPr>
                                   </m:ctrlPr>
                                 </m:sSupPr>
@@ -11172,7 +11156,8 @@
                         <m:sSubPr>
                           <m:ctrlPr>
                             <a:rPr lang="en-US" i="1">
-                              <a:latin typeface="Cambria Math" panose="02040503050406030204" pitchFamily="18" charset="0"/>
+                              <a:latin typeface="Cambria Math"/>
+                              <a:ea typeface="Cambria Math"/>
                             </a:rPr>
                           </m:ctrlPr>
                         </m:sSubPr>
@@ -11211,7 +11196,8 @@
                       <m:sSubPr>
                         <m:ctrlPr>
                           <a:rPr lang="en-US" i="1">
-                            <a:latin typeface="Cambria Math" panose="02040503050406030204" pitchFamily="18" charset="0"/>
+                            <a:latin typeface="Cambria Math"/>
+                            <a:ea typeface="Cambria Math"/>
                           </a:rPr>
                         </m:ctrlPr>
                       </m:sSubPr>
@@ -11255,7 +11241,8 @@
                       <m:sSubPr>
                         <m:ctrlPr>
                           <a:rPr lang="en-US" i="1">
-                            <a:latin typeface="Cambria Math" panose="02040503050406030204" pitchFamily="18" charset="0"/>
+                            <a:latin typeface="Cambria Math"/>
+                            <a:ea typeface="Cambria Math"/>
                           </a:rPr>
                         </m:ctrlPr>
                       </m:sSubPr>
@@ -11668,15 +11655,12 @@
                 </a:pPr>
                 <a14:m>
                   <m:oMathPara xmlns:m="http://schemas.openxmlformats.org/officeDocument/2006/math">
-                    <m:oMathParaPr>
-                      <m:jc m:val="centerGroup"/>
-                    </m:oMathParaPr>
-                    <m:oMath xmlns:m="http://schemas.openxmlformats.org/officeDocument/2006/math">
+                    <m:oMath>
                       <m:sSub>
                         <m:sSubPr>
                           <m:ctrlPr>
-                            <a:rPr lang="en-US" i="1" smtClean="0">
-                              <a:latin typeface="Cambria Math" panose="02040503050406030204" pitchFamily="18" charset="0"/>
+                            <a:rPr lang="en-US" i="1">
+                              <a:latin typeface="Cambria Math"/>
                             </a:rPr>
                           </m:ctrlPr>
                         </m:sSubPr>
@@ -11707,7 +11691,7 @@
                         <m:dPr>
                           <m:ctrlPr>
                             <a:rPr lang="en-US" i="1">
-                              <a:latin typeface="Cambria Math" panose="02040503050406030204" pitchFamily="18" charset="0"/>
+                              <a:latin typeface="Cambria Math"/>
                             </a:rPr>
                           </m:ctrlPr>
                         </m:dPr>
@@ -11730,7 +11714,7 @@
                         <m:sSubPr>
                           <m:ctrlPr>
                             <a:rPr lang="en-US" i="1">
-                              <a:latin typeface="Cambria Math" panose="02040503050406030204" pitchFamily="18" charset="0"/>
+                              <a:latin typeface="Cambria Math"/>
                             </a:rPr>
                           </m:ctrlPr>
                         </m:sSubPr>
@@ -11773,7 +11757,7 @@
                                 <m:fPr>
                                   <m:ctrlPr>
                                     <a:rPr lang="en-US" i="1">
-                                      <a:latin typeface="Cambria Math" panose="02040503050406030204" pitchFamily="18" charset="0"/>
+                                      <a:latin typeface="Cambria Math"/>
                                     </a:rPr>
                                   </m:ctrlPr>
                                 </m:fPr>
@@ -11789,8 +11773,8 @@
                                   <m:sSub>
                                     <m:sSubPr>
                                       <m:ctrlPr>
-                                        <a:rPr lang="en-US" i="1">
-                                          <a:latin typeface="Cambria Math" panose="02040503050406030204" pitchFamily="18" charset="0"/>
+                                        <a:rPr lang="en-US" b="0" i="1" smtClean="0">
+                                          <a:latin typeface="Cambria Math"/>
                                         </a:rPr>
                                       </m:ctrlPr>
                                     </m:sSubPr>
@@ -11844,10 +11828,7 @@
                 </a:pPr>
                 <a14:m>
                   <m:oMathPara xmlns:m="http://schemas.openxmlformats.org/officeDocument/2006/math">
-                    <m:oMathParaPr>
-                      <m:jc m:val="centerGroup"/>
-                    </m:oMathParaPr>
-                    <m:oMath xmlns:m="http://schemas.openxmlformats.org/officeDocument/2006/math">
+                    <m:oMath>
                       <m:f>
                         <m:fPr>
                           <m:ctrlPr>
@@ -11861,7 +11842,7 @@
                             <m:sSubPr>
                               <m:ctrlPr>
                                 <a:rPr lang="en-US" i="1">
-                                  <a:latin typeface="Cambria Math" panose="02040503050406030204" pitchFamily="18" charset="0"/>
+                                  <a:latin typeface="Cambria Math"/>
                                 </a:rPr>
                               </m:ctrlPr>
                             </m:sSubPr>
@@ -11894,7 +11875,7 @@
                             <m:sSubPr>
                               <m:ctrlPr>
                                 <a:rPr lang="en-US" i="1">
-                                  <a:latin typeface="Cambria Math" panose="02040503050406030204" pitchFamily="18" charset="0"/>
+                                  <a:latin typeface="Cambria Math"/>
                                 </a:rPr>
                               </m:ctrlPr>
                             </m:sSubPr>
@@ -11945,7 +11926,7 @@
                                 <m:sSubPr>
                                   <m:ctrlPr>
                                     <a:rPr lang="en-US" i="1">
-                                      <a:latin typeface="Cambria Math" panose="02040503050406030204" pitchFamily="18" charset="0"/>
+                                      <a:latin typeface="Cambria Math"/>
                                     </a:rPr>
                                   </m:ctrlPr>
                                 </m:sSubPr>
@@ -11972,7 +11953,7 @@
                                 <m:sSupPr>
                                   <m:ctrlPr>
                                     <a:rPr lang="en-US" i="1">
-                                      <a:latin typeface="Cambria Math" panose="02040503050406030204" pitchFamily="18" charset="0"/>
+                                      <a:latin typeface="Cambria Math"/>
                                     </a:rPr>
                                   </m:ctrlPr>
                                 </m:sSupPr>
@@ -12001,7 +11982,8 @@
                         <m:sSubPr>
                           <m:ctrlPr>
                             <a:rPr lang="en-US" i="1">
-                              <a:latin typeface="Cambria Math" panose="02040503050406030204" pitchFamily="18" charset="0"/>
+                              <a:latin typeface="Cambria Math"/>
+                              <a:ea typeface="Cambria Math"/>
                             </a:rPr>
                           </m:ctrlPr>
                         </m:sSubPr>
@@ -12122,7 +12104,7 @@
                       <m:sSubPr>
                         <m:ctrlPr>
                           <a:rPr lang="en-US" i="1">
-                            <a:latin typeface="Cambria Math" panose="02040503050406030204" pitchFamily="18" charset="0"/>
+                            <a:latin typeface="Cambria Math"/>
                           </a:rPr>
                         </m:ctrlPr>
                       </m:sSubPr>
@@ -12155,7 +12137,7 @@
                       <m:sSubPr>
                         <m:ctrlPr>
                           <a:rPr lang="en-US" i="1">
-                            <a:latin typeface="Cambria Math" panose="02040503050406030204" pitchFamily="18" charset="0"/>
+                            <a:latin typeface="Cambria Math"/>
                           </a:rPr>
                         </m:ctrlPr>
                       </m:sSubPr>
@@ -12198,7 +12180,7 @@
                       <m:sSubPr>
                         <m:ctrlPr>
                           <a:rPr lang="en-US" i="1">
-                            <a:latin typeface="Cambria Math" panose="02040503050406030204" pitchFamily="18" charset="0"/>
+                            <a:latin typeface="Cambria Math"/>
                           </a:rPr>
                         </m:ctrlPr>
                       </m:sSubPr>
@@ -12238,7 +12220,7 @@
                       <m:sSubPr>
                         <m:ctrlPr>
                           <a:rPr lang="en-US" i="1">
-                            <a:latin typeface="Cambria Math" panose="02040503050406030204" pitchFamily="18" charset="0"/>
+                            <a:latin typeface="Cambria Math"/>
                           </a:rPr>
                         </m:ctrlPr>
                       </m:sSubPr>
@@ -12531,10 +12513,7 @@
                 </a:pPr>
                 <a14:m>
                   <m:oMathPara xmlns:m="http://schemas.openxmlformats.org/officeDocument/2006/math">
-                    <m:oMathParaPr>
-                      <m:jc m:val="centerGroup"/>
-                    </m:oMathParaPr>
-                    <m:oMath xmlns:m="http://schemas.openxmlformats.org/officeDocument/2006/math">
+                    <m:oMath>
                       <m:f>
                         <m:fPr>
                           <m:ctrlPr>
@@ -12548,7 +12527,7 @@
                             <m:sSubPr>
                               <m:ctrlPr>
                                 <a:rPr lang="en-US" i="1">
-                                  <a:latin typeface="Cambria Math" panose="02040503050406030204" pitchFamily="18" charset="0"/>
+                                  <a:latin typeface="Cambria Math"/>
                                 </a:rPr>
                               </m:ctrlPr>
                             </m:sSubPr>
@@ -12581,7 +12560,7 @@
                             <m:sSubPr>
                               <m:ctrlPr>
                                 <a:rPr lang="en-US" i="1">
-                                  <a:latin typeface="Cambria Math" panose="02040503050406030204" pitchFamily="18" charset="0"/>
+                                  <a:latin typeface="Cambria Math"/>
                                 </a:rPr>
                               </m:ctrlPr>
                             </m:sSubPr>
@@ -12632,7 +12611,7 @@
                                 <m:sSubPr>
                                   <m:ctrlPr>
                                     <a:rPr lang="en-US" i="1">
-                                      <a:latin typeface="Cambria Math" panose="02040503050406030204" pitchFamily="18" charset="0"/>
+                                      <a:latin typeface="Cambria Math"/>
                                     </a:rPr>
                                   </m:ctrlPr>
                                 </m:sSubPr>
@@ -12659,7 +12638,7 @@
                                 <m:sSupPr>
                                   <m:ctrlPr>
                                     <a:rPr lang="en-US" i="1">
-                                      <a:latin typeface="Cambria Math" panose="02040503050406030204" pitchFamily="18" charset="0"/>
+                                      <a:latin typeface="Cambria Math"/>
                                     </a:rPr>
                                   </m:ctrlPr>
                                 </m:sSupPr>
@@ -12688,7 +12667,8 @@
                         <m:sSubPr>
                           <m:ctrlPr>
                             <a:rPr lang="en-US" i="1">
-                              <a:latin typeface="Cambria Math" panose="02040503050406030204" pitchFamily="18" charset="0"/>
+                              <a:latin typeface="Cambria Math"/>
+                              <a:ea typeface="Cambria Math"/>
                             </a:rPr>
                           </m:ctrlPr>
                         </m:sSubPr>
@@ -12727,10 +12707,7 @@
                 </a:pPr>
                 <a14:m>
                   <m:oMathPara xmlns:m="http://schemas.openxmlformats.org/officeDocument/2006/math">
-                    <m:oMathParaPr>
-                      <m:jc m:val="centerGroup"/>
-                    </m:oMathParaPr>
-                    <m:oMath xmlns:m="http://schemas.openxmlformats.org/officeDocument/2006/math">
+                    <m:oMath>
                       <m:f>
                         <m:fPr>
                           <m:ctrlPr>
@@ -12744,7 +12721,7 @@
                             <m:sSubPr>
                               <m:ctrlPr>
                                 <a:rPr lang="en-US" i="1">
-                                  <a:latin typeface="Cambria Math" panose="02040503050406030204" pitchFamily="18" charset="0"/>
+                                  <a:latin typeface="Cambria Math"/>
                                 </a:rPr>
                               </m:ctrlPr>
                             </m:sSubPr>
@@ -12777,7 +12754,7 @@
                             <m:sSubPr>
                               <m:ctrlPr>
                                 <a:rPr lang="en-US" i="1">
-                                  <a:latin typeface="Cambria Math" panose="02040503050406030204" pitchFamily="18" charset="0"/>
+                                  <a:latin typeface="Cambria Math"/>
                                 </a:rPr>
                               </m:ctrlPr>
                             </m:sSubPr>
@@ -12828,7 +12805,7 @@
                                 <m:dPr>
                                   <m:ctrlPr>
                                     <a:rPr lang="en-US" i="1">
-                                      <a:latin typeface="Cambria Math" panose="02040503050406030204" pitchFamily="18" charset="0"/>
+                                      <a:latin typeface="Cambria Math"/>
                                     </a:rPr>
                                   </m:ctrlPr>
                                 </m:dPr>
@@ -12851,7 +12828,7 @@
                                 <m:sSubPr>
                                   <m:ctrlPr>
                                     <a:rPr lang="en-US" i="1">
-                                      <a:latin typeface="Cambria Math" panose="02040503050406030204" pitchFamily="18" charset="0"/>
+                                      <a:latin typeface="Cambria Math"/>
                                     </a:rPr>
                                   </m:ctrlPr>
                                 </m:sSubPr>
@@ -12878,7 +12855,7 @@
                                 <m:sSupPr>
                                   <m:ctrlPr>
                                     <a:rPr lang="en-US" i="1">
-                                      <a:latin typeface="Cambria Math" panose="02040503050406030204" pitchFamily="18" charset="0"/>
+                                      <a:latin typeface="Cambria Math"/>
                                     </a:rPr>
                                   </m:ctrlPr>
                                 </m:sSupPr>
@@ -12925,7 +12902,7 @@
                                 <m:fPr>
                                   <m:ctrlPr>
                                     <a:rPr lang="en-US" i="1">
-                                      <a:latin typeface="Cambria Math" panose="02040503050406030204" pitchFamily="18" charset="0"/>
+                                      <a:latin typeface="Cambria Math"/>
                                     </a:rPr>
                                   </m:ctrlPr>
                                 </m:fPr>
@@ -12942,7 +12919,7 @@
                                     <m:sSubPr>
                                       <m:ctrlPr>
                                         <a:rPr lang="en-US" i="1">
-                                          <a:latin typeface="Cambria Math" panose="02040503050406030204" pitchFamily="18" charset="0"/>
+                                          <a:latin typeface="Cambria Math"/>
                                         </a:rPr>
                                       </m:ctrlPr>
                                     </m:sSubPr>
@@ -12981,7 +12958,8 @@
                         <m:sSubPr>
                           <m:ctrlPr>
                             <a:rPr lang="en-US" i="1">
-                              <a:latin typeface="Cambria Math" panose="02040503050406030204" pitchFamily="18" charset="0"/>
+                              <a:latin typeface="Cambria Math"/>
+                              <a:ea typeface="Cambria Math"/>
                             </a:rPr>
                           </m:ctrlPr>
                         </m:sSubPr>
@@ -13231,10 +13209,7 @@
                 </a:pPr>
                 <a14:m>
                   <m:oMathPara xmlns:m="http://schemas.openxmlformats.org/officeDocument/2006/math">
-                    <m:oMathParaPr>
-                      <m:jc m:val="centerGroup"/>
-                    </m:oMathParaPr>
-                    <m:oMath xmlns:m="http://schemas.openxmlformats.org/officeDocument/2006/math">
+                    <m:oMath>
                       <m:sSub>
                         <m:sSubPr>
                           <m:ctrlPr>
@@ -13283,7 +13258,7 @@
                         <m:sSubPr>
                           <m:ctrlPr>
                             <a:rPr lang="en-US" i="1">
-                              <a:latin typeface="Cambria Math" panose="02040503050406030204" pitchFamily="18" charset="0"/>
+                              <a:latin typeface="Cambria Math"/>
                             </a:rPr>
                           </m:ctrlPr>
                         </m:sSubPr>
@@ -13308,7 +13283,8 @@
                         <m:sSubPr>
                           <m:ctrlPr>
                             <a:rPr lang="en-US" i="1">
-                              <a:latin typeface="Cambria Math" panose="02040503050406030204" pitchFamily="18" charset="0"/>
+                              <a:latin typeface="Cambria Math"/>
+                              <a:ea typeface="Cambria Math"/>
                             </a:rPr>
                           </m:ctrlPr>
                         </m:sSubPr>
@@ -13778,14 +13754,11 @@
                 </a:pPr>
                 <a14:m>
                   <m:oMathPara xmlns:m="http://schemas.openxmlformats.org/officeDocument/2006/math">
-                    <m:oMathParaPr>
-                      <m:jc m:val="centerGroup"/>
-                    </m:oMathParaPr>
-                    <m:oMath xmlns:m="http://schemas.openxmlformats.org/officeDocument/2006/math">
+                    <m:oMath>
                       <m:sSub>
                         <m:sSubPr>
                           <m:ctrlPr>
-                            <a:rPr lang="en-US" i="1" smtClean="0">
+                            <a:rPr lang="en-US" i="1">
                               <a:latin typeface="Cambria Math" panose="02040503050406030204" pitchFamily="18" charset="0"/>
                             </a:rPr>
                           </m:ctrlPr>
@@ -13830,7 +13803,7 @@
                         <m:sSubPr>
                           <m:ctrlPr>
                             <a:rPr lang="en-US" i="1">
-                              <a:latin typeface="Cambria Math" panose="02040503050406030204" pitchFamily="18" charset="0"/>
+                              <a:latin typeface="Cambria Math"/>
                             </a:rPr>
                           </m:ctrlPr>
                         </m:sSubPr>
@@ -13855,7 +13828,8 @@
                         <m:sSubPr>
                           <m:ctrlPr>
                             <a:rPr lang="en-US" i="1">
-                              <a:latin typeface="Cambria Math" panose="02040503050406030204" pitchFamily="18" charset="0"/>
+                              <a:latin typeface="Cambria Math"/>
+                              <a:ea typeface="Cambria Math"/>
                             </a:rPr>
                           </m:ctrlPr>
                         </m:sSubPr>
@@ -13939,7 +13913,7 @@
                     <m:sSub>
                       <m:sSubPr>
                         <m:ctrlPr>
-                          <a:rPr lang="is-IS" i="1" smtClean="0">
+                          <a:rPr lang="is-IS" b="0" i="1" smtClean="0">
                             <a:latin typeface="Cambria Math" panose="02040503050406030204" pitchFamily="18" charset="0"/>
                           </a:rPr>
                         </m:ctrlPr>
@@ -13979,7 +13953,8 @@
                       <m:sSubPr>
                         <m:ctrlPr>
                           <a:rPr lang="en-US" i="1">
-                            <a:latin typeface="Cambria Math" panose="02040503050406030204" pitchFamily="18" charset="0"/>
+                            <a:latin typeface="Cambria Math"/>
+                            <a:ea typeface="Cambria Math"/>
                           </a:rPr>
                         </m:ctrlPr>
                       </m:sSubPr>
@@ -14020,10 +13995,7 @@
                 </a:pPr>
                 <a14:m>
                   <m:oMathPara xmlns:m="http://schemas.openxmlformats.org/officeDocument/2006/math">
-                    <m:oMathParaPr>
-                      <m:jc m:val="centerGroup"/>
-                    </m:oMathParaPr>
-                    <m:oMath xmlns:m="http://schemas.openxmlformats.org/officeDocument/2006/math">
+                    <m:oMath>
                       <m:sSub>
                         <m:sSubPr>
                           <m:ctrlPr>
@@ -14071,7 +14043,7 @@
                       <m:sSubSup>
                         <m:sSubSupPr>
                           <m:ctrlPr>
-                            <a:rPr lang="en-US" i="1" smtClean="0">
+                            <a:rPr lang="en-US" i="1">
                               <a:latin typeface="Cambria Math" panose="02040503050406030204" pitchFamily="18" charset="0"/>
                             </a:rPr>
                           </m:ctrlPr>
@@ -14182,7 +14154,7 @@
                       <m:sSubPr>
                         <m:ctrlPr>
                           <a:rPr lang="en-US" i="1">
-                            <a:latin typeface="Cambria Math" panose="02040503050406030204" pitchFamily="18" charset="0"/>
+                            <a:latin typeface="Cambria Math"/>
                           </a:rPr>
                         </m:ctrlPr>
                       </m:sSubPr>
@@ -14215,7 +14187,7 @@
                       <m:sSubPr>
                         <m:ctrlPr>
                           <a:rPr lang="en-US" i="1">
-                            <a:latin typeface="Cambria Math" panose="02040503050406030204" pitchFamily="18" charset="0"/>
+                            <a:latin typeface="Cambria Math"/>
                           </a:rPr>
                         </m:ctrlPr>
                       </m:sSubPr>
@@ -14252,7 +14224,7 @@
                       <m:sSubPr>
                         <m:ctrlPr>
                           <a:rPr lang="en-US" i="1">
-                            <a:latin typeface="Cambria Math" panose="02040503050406030204" pitchFamily="18" charset="0"/>
+                            <a:latin typeface="Cambria Math"/>
                           </a:rPr>
                         </m:ctrlPr>
                       </m:sSubPr>
@@ -14345,7 +14317,7 @@
                       <m:sSubPr>
                         <m:ctrlPr>
                           <a:rPr lang="en-US" i="1">
-                            <a:latin typeface="Cambria Math" panose="02040503050406030204" pitchFamily="18" charset="0"/>
+                            <a:latin typeface="Cambria Math"/>
                           </a:rPr>
                         </m:ctrlPr>
                       </m:sSubPr>
@@ -14378,7 +14350,7 @@
                       <m:sSubPr>
                         <m:ctrlPr>
                           <a:rPr lang="en-US" i="1">
-                            <a:latin typeface="Cambria Math" panose="02040503050406030204" pitchFamily="18" charset="0"/>
+                            <a:latin typeface="Cambria Math"/>
                           </a:rPr>
                         </m:ctrlPr>
                       </m:sSubPr>
@@ -14415,7 +14387,7 @@
                       <m:sSubPr>
                         <m:ctrlPr>
                           <a:rPr lang="en-US" i="1">
-                            <a:latin typeface="Cambria Math" panose="02040503050406030204" pitchFamily="18" charset="0"/>
+                            <a:latin typeface="Cambria Math"/>
                           </a:rPr>
                         </m:ctrlPr>
                       </m:sSubPr>
@@ -14508,7 +14480,7 @@
                       <m:sSubPr>
                         <m:ctrlPr>
                           <a:rPr lang="en-US" i="1">
-                            <a:latin typeface="Cambria Math" panose="02040503050406030204" pitchFamily="18" charset="0"/>
+                            <a:latin typeface="Cambria Math"/>
                           </a:rPr>
                         </m:ctrlPr>
                       </m:sSubPr>
@@ -14541,7 +14513,7 @@
                       <m:sSubPr>
                         <m:ctrlPr>
                           <a:rPr lang="en-US" i="1">
-                            <a:latin typeface="Cambria Math" panose="02040503050406030204" pitchFamily="18" charset="0"/>
+                            <a:latin typeface="Cambria Math"/>
                           </a:rPr>
                         </m:ctrlPr>
                       </m:sSubPr>
@@ -14578,7 +14550,7 @@
                       <m:sSubPr>
                         <m:ctrlPr>
                           <a:rPr lang="en-US" i="1">
-                            <a:latin typeface="Cambria Math" panose="02040503050406030204" pitchFamily="18" charset="0"/>
+                            <a:latin typeface="Cambria Math"/>
                           </a:rPr>
                         </m:ctrlPr>
                       </m:sSubPr>
@@ -15002,14 +14974,11 @@
                 </a:pPr>
                 <a14:m>
                   <m:oMathPara xmlns:m="http://schemas.openxmlformats.org/officeDocument/2006/math">
-                    <m:oMathParaPr>
-                      <m:jc m:val="centerGroup"/>
-                    </m:oMathParaPr>
-                    <m:oMath xmlns:m="http://schemas.openxmlformats.org/officeDocument/2006/math">
+                    <m:oMath>
                       <m:sSub>
                         <m:sSubPr>
                           <m:ctrlPr>
-                            <a:rPr lang="en-US" i="1" smtClean="0">
+                            <a:rPr lang="en-US" i="1">
                               <a:latin typeface="Cambria Math" panose="02040503050406030204" pitchFamily="18" charset="0"/>
                             </a:rPr>
                           </m:ctrlPr>
@@ -15054,7 +15023,7 @@
                         <m:sSubPr>
                           <m:ctrlPr>
                             <a:rPr lang="en-US" i="1">
-                              <a:latin typeface="Cambria Math" panose="02040503050406030204" pitchFamily="18" charset="0"/>
+                              <a:latin typeface="Cambria Math"/>
                             </a:rPr>
                           </m:ctrlPr>
                         </m:sSubPr>
@@ -15079,7 +15048,8 @@
                         <m:sSubPr>
                           <m:ctrlPr>
                             <a:rPr lang="en-US" i="1">
-                              <a:latin typeface="Cambria Math" panose="02040503050406030204" pitchFamily="18" charset="0"/>
+                              <a:latin typeface="Cambria Math"/>
+                              <a:ea typeface="Cambria Math"/>
                             </a:rPr>
                           </m:ctrlPr>
                         </m:sSubPr>
@@ -15156,7 +15126,7 @@
                       <m:sSubPr>
                         <m:ctrlPr>
                           <a:rPr lang="en-US" i="1">
-                            <a:latin typeface="Cambria Math" panose="02040503050406030204" pitchFamily="18" charset="0"/>
+                            <a:latin typeface="Cambria Math"/>
                           </a:rPr>
                         </m:ctrlPr>
                       </m:sSubPr>
@@ -15195,7 +15165,7 @@
                       <m:sSubPr>
                         <m:ctrlPr>
                           <a:rPr lang="en-US" i="1">
-                            <a:latin typeface="Cambria Math" panose="02040503050406030204" pitchFamily="18" charset="0"/>
+                            <a:latin typeface="Cambria Math"/>
                           </a:rPr>
                         </m:ctrlPr>
                       </m:sSubPr>
@@ -15228,7 +15198,7 @@
                       <m:sSubPr>
                         <m:ctrlPr>
                           <a:rPr lang="en-US" i="1">
-                            <a:latin typeface="Cambria Math" panose="02040503050406030204" pitchFamily="18" charset="0"/>
+                            <a:latin typeface="Cambria Math"/>
                           </a:rPr>
                         </m:ctrlPr>
                       </m:sSubPr>
@@ -15265,7 +15235,7 @@
                       <m:sSubPr>
                         <m:ctrlPr>
                           <a:rPr lang="en-US" i="1">
-                            <a:latin typeface="Cambria Math" panose="02040503050406030204" pitchFamily="18" charset="0"/>
+                            <a:latin typeface="Cambria Math"/>
                           </a:rPr>
                         </m:ctrlPr>
                       </m:sSubPr>
@@ -15318,7 +15288,8 @@
                       <m:sSubPr>
                         <m:ctrlPr>
                           <a:rPr lang="en-US" i="1" smtClean="0">
-                            <a:latin typeface="Cambria Math" panose="02040503050406030204" pitchFamily="18" charset="0"/>
+                            <a:latin typeface="Cambria Math"/>
+                            <a:ea typeface="Cambria Math"/>
                           </a:rPr>
                         </m:ctrlPr>
                       </m:sSubPr>
@@ -15357,8 +15328,8 @@
                     <m:sSub>
                       <m:sSubPr>
                         <m:ctrlPr>
-                          <a:rPr lang="en-US" i="1" smtClean="0">
-                            <a:latin typeface="Cambria Math" panose="02040503050406030204" pitchFamily="18" charset="0"/>
+                          <a:rPr lang="en-US" b="0" i="1" smtClean="0">
+                            <a:latin typeface="Cambria Math"/>
                           </a:rPr>
                         </m:ctrlPr>
                       </m:sSubPr>
@@ -15403,7 +15374,7 @@
                       <m:sSubPr>
                         <m:ctrlPr>
                           <a:rPr lang="en-US" i="1">
-                            <a:latin typeface="Cambria Math" panose="02040503050406030204" pitchFamily="18" charset="0"/>
+                            <a:latin typeface="Cambria Math"/>
                           </a:rPr>
                         </m:ctrlPr>
                       </m:sSubPr>
@@ -15436,8 +15407,8 @@
                       <m:accPr>
                         <m:chr m:val="̅"/>
                         <m:ctrlPr>
-                          <a:rPr lang="en-US" i="1" smtClean="0">
-                            <a:latin typeface="Cambria Math" panose="02040503050406030204" pitchFamily="18" charset="0"/>
+                          <a:rPr lang="en-US" b="0" i="1" smtClean="0">
+                            <a:latin typeface="Cambria Math"/>
                           </a:rPr>
                         </m:ctrlPr>
                       </m:accPr>
@@ -16112,8 +16083,8 @@
                       <m:accPr>
                         <m:chr m:val="̅"/>
                         <m:ctrlPr>
-                          <a:rPr lang="en-US" i="1" smtClean="0">
-                            <a:latin typeface="Cambria Math" panose="02040503050406030204" pitchFamily="18" charset="0"/>
+                          <a:rPr lang="en-US" b="0" i="1" smtClean="0">
+                            <a:latin typeface="Cambria Math"/>
                           </a:rPr>
                         </m:ctrlPr>
                       </m:accPr>
@@ -16137,8 +16108,8 @@
                     <m:sSub>
                       <m:sSubPr>
                         <m:ctrlPr>
-                          <a:rPr lang="en-US" i="1" smtClean="0">
-                            <a:latin typeface="Cambria Math" panose="02040503050406030204" pitchFamily="18" charset="0"/>
+                          <a:rPr lang="en-US" b="0" i="1" smtClean="0">
+                            <a:latin typeface="Cambria Math"/>
                           </a:rPr>
                         </m:ctrlPr>
                       </m:sSubPr>
@@ -16175,7 +16146,7 @@
                       <m:sSubPr>
                         <m:ctrlPr>
                           <a:rPr lang="en-US" b="0" i="1" smtClean="0">
-                            <a:latin typeface="Cambria Math" panose="02040503050406030204" pitchFamily="18" charset="0"/>
+                            <a:latin typeface="Cambria Math"/>
                           </a:rPr>
                         </m:ctrlPr>
                       </m:sSubPr>
@@ -16207,7 +16178,7 @@
                         <m:chr m:val="̅"/>
                         <m:ctrlPr>
                           <a:rPr lang="en-US" b="0" i="1" smtClean="0">
-                            <a:latin typeface="Cambria Math" panose="02040503050406030204" pitchFamily="18" charset="0"/>
+                            <a:latin typeface="Cambria Math"/>
                           </a:rPr>
                         </m:ctrlPr>
                       </m:accPr>
@@ -16239,7 +16210,7 @@
                       <m:sSubPr>
                         <m:ctrlPr>
                           <a:rPr lang="en-US" i="1">
-                            <a:latin typeface="Cambria Math" panose="02040503050406030204" pitchFamily="18" charset="0"/>
+                            <a:latin typeface="Cambria Math"/>
                           </a:rPr>
                         </m:ctrlPr>
                       </m:sSubPr>
@@ -16278,7 +16249,7 @@
                       <m:sSubPr>
                         <m:ctrlPr>
                           <a:rPr lang="en-US" i="1">
-                            <a:latin typeface="Cambria Math" panose="02040503050406030204" pitchFamily="18" charset="0"/>
+                            <a:latin typeface="Cambria Math"/>
                           </a:rPr>
                         </m:ctrlPr>
                       </m:sSubPr>
@@ -16311,8 +16282,8 @@
                       <m:accPr>
                         <m:chr m:val="̅"/>
                         <m:ctrlPr>
-                          <a:rPr lang="en-US" i="1" smtClean="0">
-                            <a:latin typeface="Cambria Math" panose="02040503050406030204" pitchFamily="18" charset="0"/>
+                          <a:rPr lang="en-US" b="0" i="1" smtClean="0">
+                            <a:latin typeface="Cambria Math"/>
                           </a:rPr>
                         </m:ctrlPr>
                       </m:accPr>
@@ -16337,7 +16308,8 @@
                       <m:sSubPr>
                         <m:ctrlPr>
                           <a:rPr lang="en-US" i="1">
-                            <a:latin typeface="Cambria Math" panose="02040503050406030204" pitchFamily="18" charset="0"/>
+                            <a:latin typeface="Cambria Math"/>
+                            <a:ea typeface="Cambria Math"/>
                           </a:rPr>
                         </m:ctrlPr>
                       </m:sSubPr>
@@ -16378,16 +16350,13 @@
                 </a:pPr>
                 <a14:m>
                   <m:oMathPara xmlns:m="http://schemas.openxmlformats.org/officeDocument/2006/math">
-                    <m:oMathParaPr>
-                      <m:jc m:val="centerGroup"/>
-                    </m:oMathParaPr>
-                    <m:oMath xmlns:m="http://schemas.openxmlformats.org/officeDocument/2006/math">
+                    <m:oMath>
                       <m:acc>
                         <m:accPr>
                           <m:chr m:val="̅"/>
                           <m:ctrlPr>
                             <a:rPr lang="en-US" i="1">
-                              <a:latin typeface="Cambria Math" panose="02040503050406030204" pitchFamily="18" charset="0"/>
+                              <a:latin typeface="Cambria Math"/>
                             </a:rPr>
                           </m:ctrlPr>
                         </m:accPr>
@@ -16417,7 +16386,7 @@
                         <m:sSubPr>
                           <m:ctrlPr>
                             <a:rPr lang="en-US" i="1">
-                              <a:latin typeface="Cambria Math" panose="02040503050406030204" pitchFamily="18" charset="0"/>
+                              <a:latin typeface="Cambria Math"/>
                             </a:rPr>
                           </m:ctrlPr>
                         </m:sSubPr>
@@ -16441,7 +16410,7 @@
                       <m:sSup>
                         <m:sSupPr>
                           <m:ctrlPr>
-                            <a:rPr lang="en-US" i="1" smtClean="0">
+                            <a:rPr lang="en-US" b="0" i="1" smtClean="0">
                               <a:latin typeface="Cambria Math" panose="02040503050406030204" pitchFamily="18" charset="0"/>
                             </a:rPr>
                           </m:ctrlPr>
@@ -16451,7 +16420,7 @@
                             <m:accPr>
                               <m:chr m:val="̅"/>
                               <m:ctrlPr>
-                                <a:rPr lang="en-US" i="1" smtClean="0">
+                                <a:rPr lang="en-US" b="0" i="1" smtClean="0">
                                   <a:latin typeface="Cambria Math" panose="02040503050406030204" pitchFamily="18" charset="0"/>
                                 </a:rPr>
                               </m:ctrlPr>
@@ -16501,8 +16470,8 @@
                       <m:accPr>
                         <m:chr m:val="̅"/>
                         <m:ctrlPr>
-                          <a:rPr lang="en-US" i="1" smtClean="0">
-                            <a:latin typeface="Cambria Math" panose="02040503050406030204" pitchFamily="18" charset="0"/>
+                          <a:rPr lang="en-US" b="0" i="1" smtClean="0">
+                            <a:latin typeface="Cambria Math"/>
                           </a:rPr>
                         </m:ctrlPr>
                       </m:accPr>
@@ -16528,16 +16497,13 @@
                 </a:pPr>
                 <a14:m>
                   <m:oMathPara xmlns:m="http://schemas.openxmlformats.org/officeDocument/2006/math">
-                    <m:oMathParaPr>
-                      <m:jc m:val="centerGroup"/>
-                    </m:oMathParaPr>
-                    <m:oMath xmlns:m="http://schemas.openxmlformats.org/officeDocument/2006/math">
+                    <m:oMath>
                       <m:acc>
                         <m:accPr>
                           <m:chr m:val="̅"/>
                           <m:ctrlPr>
                             <a:rPr lang="en-US" i="1">
-                              <a:latin typeface="Cambria Math" panose="02040503050406030204" pitchFamily="18" charset="0"/>
+                              <a:latin typeface="Cambria Math"/>
                             </a:rPr>
                           </m:ctrlPr>
                         </m:accPr>
@@ -16561,6 +16527,7 @@
                           <m:ctrlPr>
                             <a:rPr lang="en-US" i="1">
                               <a:latin typeface="Cambria Math" panose="02040503050406030204" pitchFamily="18" charset="0"/>
+                              <a:ea typeface="Cambria Math"/>
                             </a:rPr>
                           </m:ctrlPr>
                         </m:sSupPr>
@@ -16569,7 +16536,8 @@
                             <m:dPr>
                               <m:ctrlPr>
                                 <a:rPr lang="en-US" i="1">
-                                  <a:latin typeface="Cambria Math" panose="02040503050406030204" pitchFamily="18" charset="0"/>
+                                  <a:latin typeface="Cambria Math"/>
+                                  <a:ea typeface="Cambria Math"/>
                                 </a:rPr>
                               </m:ctrlPr>
                             </m:dPr>
@@ -16585,7 +16553,7 @@
                                 <m:sSubPr>
                                   <m:ctrlPr>
                                     <a:rPr lang="en-US" i="1">
-                                      <a:latin typeface="Cambria Math" panose="02040503050406030204" pitchFamily="18" charset="0"/>
+                                      <a:latin typeface="Cambria Math"/>
                                       <a:ea typeface="Cambria Math"/>
                                     </a:rPr>
                                   </m:ctrlPr>
@@ -16616,8 +16584,8 @@
                           <m:f>
                             <m:fPr>
                               <m:ctrlPr>
-                                <a:rPr lang="en-US" i="1" smtClean="0">
-                                  <a:latin typeface="Cambria Math" panose="02040503050406030204" pitchFamily="18" charset="0"/>
+                                <a:rPr lang="en-US" b="0" i="1" smtClean="0">
+                                  <a:latin typeface="Cambria Math"/>
                                 </a:rPr>
                               </m:ctrlPr>
                             </m:fPr>
@@ -16944,15 +16912,12 @@
                 </a:pPr>
                 <a14:m>
                   <m:oMathPara xmlns:m="http://schemas.openxmlformats.org/officeDocument/2006/math">
-                    <m:oMathParaPr>
-                      <m:jc m:val="centerGroup"/>
-                    </m:oMathParaPr>
-                    <m:oMath xmlns:m="http://schemas.openxmlformats.org/officeDocument/2006/math">
+                    <m:oMath>
                       <m:sSub>
                         <m:sSubPr>
                           <m:ctrlPr>
                             <a:rPr lang="en-US" sz="3200" i="1">
-                              <a:latin typeface="Cambria Math" panose="02040503050406030204" pitchFamily="18" charset="0"/>
+                              <a:latin typeface="Cambria Math"/>
                             </a:rPr>
                           </m:ctrlPr>
                         </m:sSubPr>
@@ -16983,7 +16948,7 @@
                         <m:dPr>
                           <m:ctrlPr>
                             <a:rPr lang="en-US" sz="3200" i="1">
-                              <a:latin typeface="Cambria Math" panose="02040503050406030204" pitchFamily="18" charset="0"/>
+                              <a:latin typeface="Cambria Math"/>
                             </a:rPr>
                           </m:ctrlPr>
                         </m:dPr>
@@ -17006,7 +16971,7 @@
                         <m:sSubPr>
                           <m:ctrlPr>
                             <a:rPr lang="en-US" sz="3200" i="1">
-                              <a:latin typeface="Cambria Math" panose="02040503050406030204" pitchFamily="18" charset="0"/>
+                              <a:latin typeface="Cambria Math"/>
                             </a:rPr>
                           </m:ctrlPr>
                         </m:sSubPr>
@@ -17049,7 +17014,7 @@
                                 <m:fPr>
                                   <m:ctrlPr>
                                     <a:rPr lang="en-US" sz="3200" i="1">
-                                      <a:latin typeface="Cambria Math" panose="02040503050406030204" pitchFamily="18" charset="0"/>
+                                      <a:latin typeface="Cambria Math"/>
                                     </a:rPr>
                                   </m:ctrlPr>
                                 </m:fPr>
@@ -17066,7 +17031,7 @@
                                     <m:sSubPr>
                                       <m:ctrlPr>
                                         <a:rPr lang="en-US" sz="3200" i="1">
-                                          <a:latin typeface="Cambria Math" panose="02040503050406030204" pitchFamily="18" charset="0"/>
+                                          <a:latin typeface="Cambria Math"/>
                                         </a:rPr>
                                       </m:ctrlPr>
                                     </m:sSubPr>
@@ -17349,10 +17314,7 @@
                 </a:pPr>
                 <a14:m>
                   <m:oMathPara xmlns:m="http://schemas.openxmlformats.org/officeDocument/2006/math">
-                    <m:oMathParaPr>
-                      <m:jc m:val="centerGroup"/>
-                    </m:oMathParaPr>
-                    <m:oMath xmlns:m="http://schemas.openxmlformats.org/officeDocument/2006/math">
+                    <m:oMath>
                       <m:sSub>
                         <m:sSubPr>
                           <m:ctrlPr>
@@ -17401,7 +17363,7 @@
                         <m:sSubPr>
                           <m:ctrlPr>
                             <a:rPr lang="en-US" i="1">
-                              <a:latin typeface="Cambria Math" panose="02040503050406030204" pitchFamily="18" charset="0"/>
+                              <a:latin typeface="Cambria Math"/>
                             </a:rPr>
                           </m:ctrlPr>
                         </m:sSubPr>
@@ -17426,7 +17388,8 @@
                         <m:sSubPr>
                           <m:ctrlPr>
                             <a:rPr lang="en-US" i="1">
-                              <a:latin typeface="Cambria Math" panose="02040503050406030204" pitchFamily="18" charset="0"/>
+                              <a:latin typeface="Cambria Math"/>
+                              <a:ea typeface="Cambria Math"/>
                             </a:rPr>
                           </m:ctrlPr>
                         </m:sSubPr>
@@ -17507,7 +17470,7 @@
                       <m:sSubPr>
                         <m:ctrlPr>
                           <a:rPr lang="en-US" i="1">
-                            <a:latin typeface="Cambria Math" panose="02040503050406030204" pitchFamily="18" charset="0"/>
+                            <a:latin typeface="Cambria Math"/>
                           </a:rPr>
                         </m:ctrlPr>
                       </m:sSubPr>
@@ -17574,15 +17537,12 @@
                 </a:pPr>
                 <a14:m>
                   <m:oMathPara xmlns:m="http://schemas.openxmlformats.org/officeDocument/2006/math">
-                    <m:oMathParaPr>
-                      <m:jc m:val="centerGroup"/>
-                    </m:oMathParaPr>
-                    <m:oMath xmlns:m="http://schemas.openxmlformats.org/officeDocument/2006/math">
+                    <m:oMath>
                       <m:sSub>
                         <m:sSubPr>
                           <m:ctrlPr>
                             <a:rPr lang="en-US" i="1">
-                              <a:latin typeface="Cambria Math" panose="02040503050406030204" pitchFamily="18" charset="0"/>
+                              <a:latin typeface="Cambria Math"/>
                             </a:rPr>
                           </m:ctrlPr>
                         </m:sSubPr>
@@ -17613,7 +17573,7 @@
                         <m:dPr>
                           <m:ctrlPr>
                             <a:rPr lang="en-US" i="1">
-                              <a:latin typeface="Cambria Math" panose="02040503050406030204" pitchFamily="18" charset="0"/>
+                              <a:latin typeface="Cambria Math"/>
                             </a:rPr>
                           </m:ctrlPr>
                         </m:dPr>
@@ -17636,7 +17596,7 @@
                         <m:sSubPr>
                           <m:ctrlPr>
                             <a:rPr lang="en-US" i="1">
-                              <a:latin typeface="Cambria Math" panose="02040503050406030204" pitchFamily="18" charset="0"/>
+                              <a:latin typeface="Cambria Math"/>
                             </a:rPr>
                           </m:ctrlPr>
                         </m:sSubPr>
@@ -17679,7 +17639,7 @@
                                 <m:fPr>
                                   <m:ctrlPr>
                                     <a:rPr lang="en-US" i="1">
-                                      <a:latin typeface="Cambria Math" panose="02040503050406030204" pitchFamily="18" charset="0"/>
+                                      <a:latin typeface="Cambria Math"/>
                                     </a:rPr>
                                   </m:ctrlPr>
                                 </m:fPr>
@@ -17696,7 +17656,7 @@
                                     <m:sSubPr>
                                       <m:ctrlPr>
                                         <a:rPr lang="en-US" i="1">
-                                          <a:latin typeface="Cambria Math" panose="02040503050406030204" pitchFamily="18" charset="0"/>
+                                          <a:latin typeface="Cambria Math"/>
                                         </a:rPr>
                                       </m:ctrlPr>
                                     </m:sSubPr>
@@ -17808,7 +17768,7 @@
                       <m:sSubPr>
                         <m:ctrlPr>
                           <a:rPr lang="en-US" i="1">
-                            <a:latin typeface="Cambria Math" panose="02040503050406030204" pitchFamily="18" charset="0"/>
+                            <a:latin typeface="Cambria Math"/>
                           </a:rPr>
                         </m:ctrlPr>
                       </m:sSubPr>
@@ -18132,7 +18092,8 @@
                       <m:sSubPr>
                         <m:ctrlPr>
                           <a:rPr lang="en-US" i="1" smtClean="0">
-                            <a:latin typeface="Cambria Math" panose="02040503050406030204" pitchFamily="18" charset="0"/>
+                            <a:latin typeface="Cambria Math"/>
+                            <a:ea typeface="Cambria Math"/>
                           </a:rPr>
                         </m:ctrlPr>
                       </m:sSubPr>
@@ -18181,8 +18142,8 @@
                     <m:sSub>
                       <m:sSubPr>
                         <m:ctrlPr>
-                          <a:rPr lang="en-US" i="1" smtClean="0">
-                            <a:latin typeface="Cambria Math" panose="02040503050406030204" pitchFamily="18" charset="0"/>
+                          <a:rPr lang="en-US" b="0" i="1" smtClean="0">
+                            <a:latin typeface="Cambria Math"/>
                           </a:rPr>
                         </m:ctrlPr>
                       </m:sSubPr>
@@ -18963,7 +18924,8 @@
                       <m:sSubPr>
                         <m:ctrlPr>
                           <a:rPr lang="en-US" i="1" smtClean="0">
-                            <a:latin typeface="Cambria Math" panose="02040503050406030204" pitchFamily="18" charset="0"/>
+                            <a:latin typeface="Cambria Math"/>
+                            <a:ea typeface="Cambria Math"/>
                           </a:rPr>
                         </m:ctrlPr>
                       </m:sSubPr>
@@ -19022,8 +18984,8 @@
                     <m:sSub>
                       <m:sSubPr>
                         <m:ctrlPr>
-                          <a:rPr lang="en-US" i="1" smtClean="0">
-                            <a:latin typeface="Cambria Math" panose="02040503050406030204" pitchFamily="18" charset="0"/>
+                          <a:rPr lang="en-US" b="0" i="1" smtClean="0">
+                            <a:latin typeface="Cambria Math"/>
                           </a:rPr>
                         </m:ctrlPr>
                       </m:sSubPr>
@@ -21027,15 +20989,12 @@
                 </a:pPr>
                 <a14:m>
                   <m:oMathPara xmlns:m="http://schemas.openxmlformats.org/officeDocument/2006/math">
-                    <m:oMathParaPr>
-                      <m:jc m:val="centerGroup"/>
-                    </m:oMathParaPr>
-                    <m:oMath xmlns:m="http://schemas.openxmlformats.org/officeDocument/2006/math">
+                    <m:oMath>
                       <m:sSub>
                         <m:sSubPr>
                           <m:ctrlPr>
                             <a:rPr lang="en-US" i="1">
-                              <a:latin typeface="Cambria Math" panose="02040503050406030204" pitchFamily="18" charset="0"/>
+                              <a:latin typeface="Cambria Math"/>
                             </a:rPr>
                           </m:ctrlPr>
                         </m:sSubPr>
@@ -21101,7 +21060,7 @@
                         <m:sSubPr>
                           <m:ctrlPr>
                             <a:rPr lang="en-US" i="1">
-                              <a:latin typeface="Cambria Math" panose="02040503050406030204" pitchFamily="18" charset="0"/>
+                              <a:latin typeface="Cambria Math"/>
                             </a:rPr>
                           </m:ctrlPr>
                         </m:sSubPr>
@@ -21126,7 +21085,7 @@
                         <m:fPr>
                           <m:ctrlPr>
                             <a:rPr lang="en-US" i="1">
-                              <a:latin typeface="Cambria Math" panose="02040503050406030204" pitchFamily="18" charset="0"/>
+                              <a:latin typeface="Cambria Math"/>
                             </a:rPr>
                           </m:ctrlPr>
                         </m:fPr>
@@ -21143,7 +21102,7 @@
                             <m:sSubSupPr>
                               <m:ctrlPr>
                                 <a:rPr lang="en-US" i="1">
-                                  <a:latin typeface="Cambria Math" panose="02040503050406030204" pitchFamily="18" charset="0"/>
+                                  <a:latin typeface="Cambria Math"/>
                                 </a:rPr>
                               </m:ctrlPr>
                             </m:sSubSupPr>
@@ -21196,8 +21155,8 @@
                     <m:sSub>
                       <m:sSubPr>
                         <m:ctrlPr>
-                          <a:rPr lang="en-US" i="1" smtClean="0">
-                            <a:latin typeface="Cambria Math" panose="02040503050406030204" pitchFamily="18" charset="0"/>
+                          <a:rPr lang="en-US" b="0" i="1" smtClean="0">
+                            <a:latin typeface="Cambria Math"/>
                           </a:rPr>
                         </m:ctrlPr>
                       </m:sSubPr>
@@ -21229,7 +21188,7 @@
                         <m:chr m:val="̅"/>
                         <m:ctrlPr>
                           <a:rPr lang="en-US" b="0" i="1" smtClean="0">
-                            <a:latin typeface="Cambria Math" panose="02040503050406030204" pitchFamily="18" charset="0"/>
+                            <a:latin typeface="Cambria Math"/>
                           </a:rPr>
                         </m:ctrlPr>
                       </m:accPr>
@@ -21267,8 +21226,8 @@
                     <m:sSub>
                       <m:sSubPr>
                         <m:ctrlPr>
-                          <a:rPr lang="en-US" i="1" smtClean="0">
-                            <a:latin typeface="Cambria Math" panose="02040503050406030204" pitchFamily="18" charset="0"/>
+                          <a:rPr lang="en-US" b="0" i="1" smtClean="0">
+                            <a:latin typeface="Cambria Math"/>
                           </a:rPr>
                         </m:ctrlPr>
                       </m:sSubPr>
@@ -21891,7 +21850,7 @@
                     <m:sSub>
                       <m:sSubPr>
                         <m:ctrlPr>
-                          <a:rPr lang="en-US" i="1" smtClean="0">
+                          <a:rPr lang="en-US" b="0" i="1" smtClean="0">
                             <a:latin typeface="Cambria Math" panose="02040503050406030204" pitchFamily="18" charset="0"/>
                           </a:rPr>
                         </m:ctrlPr>
@@ -23215,7 +23174,7 @@
             <a:pPr marL="914400" lvl="1" indent="-514350"/>
             <a:r>
               <a:rPr lang="en-US" dirty="0"/>
-              <a:t>Existence of a fix factor of production (land) important for </a:t>
+              <a:t>Existence of a fixed factor of production (land) important for </a:t>
             </a:r>
             <a:br>
               <a:rPr lang="en-US" dirty="0"/>
@@ -24263,7 +24222,7 @@
           <a:p>
             <a:r>
               <a:rPr lang="en-US" dirty="0"/>
-              <a:t>If real wages increased, this would lead to an increase in population that would only stop when wages had been bid down to subsistence</a:t>
+              <a:t>If real wages increased, this would lead to an increase in population that would only stop when wages had been pushed down to subsistence</a:t>
             </a:r>
           </a:p>
         </p:txBody>
@@ -24627,15 +24586,12 @@
                 </a:pPr>
                 <a14:m>
                   <m:oMathPara xmlns:m="http://schemas.openxmlformats.org/officeDocument/2006/math">
-                    <m:oMathParaPr>
-                      <m:jc m:val="centerGroup"/>
-                    </m:oMathParaPr>
-                    <m:oMath xmlns:m="http://schemas.openxmlformats.org/officeDocument/2006/math">
+                    <m:oMath>
                       <m:sSub>
                         <m:sSubPr>
                           <m:ctrlPr>
-                            <a:rPr lang="en-US" i="1" smtClean="0">
-                              <a:latin typeface="Cambria Math" panose="02040503050406030204" pitchFamily="18" charset="0"/>
+                            <a:rPr lang="en-US" b="0" i="1" smtClean="0">
+                              <a:latin typeface="Cambria Math"/>
                             </a:rPr>
                           </m:ctrlPr>
                         </m:sSubPr>
@@ -24666,7 +24622,7 @@
                         <m:sSubPr>
                           <m:ctrlPr>
                             <a:rPr lang="en-US" b="0" i="1" smtClean="0">
-                              <a:latin typeface="Cambria Math" panose="02040503050406030204" pitchFamily="18" charset="0"/>
+                              <a:latin typeface="Cambria Math"/>
                             </a:rPr>
                           </m:ctrlPr>
                         </m:sSubPr>
@@ -24691,7 +24647,7 @@
                         <m:sSupPr>
                           <m:ctrlPr>
                             <a:rPr lang="en-US" b="0" i="1" smtClean="0">
-                              <a:latin typeface="Cambria Math" panose="02040503050406030204" pitchFamily="18" charset="0"/>
+                              <a:latin typeface="Cambria Math"/>
                             </a:rPr>
                           </m:ctrlPr>
                         </m:sSupPr>
@@ -24716,7 +24672,7 @@
                         <m:sSubSupPr>
                           <m:ctrlPr>
                             <a:rPr lang="en-US" b="0" i="1" smtClean="0">
-                              <a:latin typeface="Cambria Math" panose="02040503050406030204" pitchFamily="18" charset="0"/>
+                              <a:latin typeface="Cambria Math"/>
                             </a:rPr>
                           </m:ctrlPr>
                         </m:sSubSupPr>
@@ -24763,8 +24719,8 @@
                     <m:sSub>
                       <m:sSubPr>
                         <m:ctrlPr>
-                          <a:rPr lang="en-US" i="1" smtClean="0">
-                            <a:latin typeface="Cambria Math" panose="02040503050406030204" pitchFamily="18" charset="0"/>
+                          <a:rPr lang="en-US" b="0" i="1" smtClean="0">
+                            <a:latin typeface="Cambria Math"/>
                           </a:rPr>
                         </m:ctrlPr>
                       </m:sSubPr>
@@ -24799,8 +24755,8 @@
                     <m:sSub>
                       <m:sSubPr>
                         <m:ctrlPr>
-                          <a:rPr lang="en-US" i="1" smtClean="0">
-                            <a:latin typeface="Cambria Math" panose="02040503050406030204" pitchFamily="18" charset="0"/>
+                          <a:rPr lang="en-US" b="0" i="1" smtClean="0">
+                            <a:latin typeface="Cambria Math"/>
                           </a:rPr>
                         </m:ctrlPr>
                       </m:sSubPr>
@@ -24852,8 +24808,8 @@
                     <m:sSub>
                       <m:sSubPr>
                         <m:ctrlPr>
-                          <a:rPr lang="en-US" i="1" smtClean="0">
-                            <a:latin typeface="Cambria Math" panose="02040503050406030204" pitchFamily="18" charset="0"/>
+                          <a:rPr lang="en-US" b="0" i="1" smtClean="0">
+                            <a:latin typeface="Cambria Math"/>
                           </a:rPr>
                         </m:ctrlPr>
                       </m:sSubPr>
@@ -25335,15 +25291,12 @@
                 </a:pPr>
                 <a14:m>
                   <m:oMathPara xmlns:m="http://schemas.openxmlformats.org/officeDocument/2006/math">
-                    <m:oMathParaPr>
-                      <m:jc m:val="centerGroup"/>
-                    </m:oMathParaPr>
-                    <m:oMath xmlns:m="http://schemas.openxmlformats.org/officeDocument/2006/math">
+                    <m:oMath>
                       <m:sSub>
                         <m:sSubPr>
                           <m:ctrlPr>
-                            <a:rPr lang="en-US" i="1" smtClean="0">
-                              <a:latin typeface="Cambria Math" panose="02040503050406030204" pitchFamily="18" charset="0"/>
+                            <a:rPr lang="en-US" b="0" i="1" smtClean="0">
+                              <a:latin typeface="Cambria Math"/>
                             </a:rPr>
                           </m:ctrlPr>
                         </m:sSubPr>
@@ -25374,7 +25327,7 @@
                         <m:dPr>
                           <m:ctrlPr>
                             <a:rPr lang="en-US" b="0" i="1" smtClean="0">
-                              <a:latin typeface="Cambria Math" panose="02040503050406030204" pitchFamily="18" charset="0"/>
+                              <a:latin typeface="Cambria Math"/>
                             </a:rPr>
                           </m:ctrlPr>
                         </m:dPr>
@@ -25397,7 +25350,7 @@
                         <m:sSubPr>
                           <m:ctrlPr>
                             <a:rPr lang="en-US" b="0" i="1" smtClean="0">
-                              <a:latin typeface="Cambria Math" panose="02040503050406030204" pitchFamily="18" charset="0"/>
+                              <a:latin typeface="Cambria Math"/>
                             </a:rPr>
                           </m:ctrlPr>
                         </m:sSubPr>
@@ -25421,7 +25374,7 @@
                       <m:sSup>
                         <m:sSupPr>
                           <m:ctrlPr>
-                            <a:rPr lang="en-US" b="0" i="1" smtClean="0">
+                            <a:rPr lang="en-US" i="1">
                               <a:latin typeface="Cambria Math" panose="02040503050406030204" pitchFamily="18" charset="0"/>
                             </a:rPr>
                           </m:ctrlPr>
@@ -25440,7 +25393,7 @@
                                 <m:fPr>
                                   <m:ctrlPr>
                                     <a:rPr lang="en-US" i="1">
-                                      <a:latin typeface="Cambria Math" panose="02040503050406030204" pitchFamily="18" charset="0"/>
+                                      <a:latin typeface="Cambria Math"/>
                                     </a:rPr>
                                   </m:ctrlPr>
                                 </m:fPr>
@@ -25457,7 +25410,7 @@
                                     <m:sSubPr>
                                       <m:ctrlPr>
                                         <a:rPr lang="en-US" i="1">
-                                          <a:latin typeface="Cambria Math" panose="02040503050406030204" pitchFamily="18" charset="0"/>
+                                          <a:latin typeface="Cambria Math"/>
                                         </a:rPr>
                                       </m:ctrlPr>
                                     </m:sSubPr>
@@ -25663,8 +25616,8 @@
                     <m:sSub>
                       <m:sSubPr>
                         <m:ctrlPr>
-                          <a:rPr lang="en-US" i="1" smtClean="0">
-                            <a:latin typeface="Cambria Math" panose="02040503050406030204" pitchFamily="18" charset="0"/>
+                          <a:rPr lang="en-US" b="0" i="1" smtClean="0">
+                            <a:latin typeface="Cambria Math"/>
                           </a:rPr>
                         </m:ctrlPr>
                       </m:sSubPr>
@@ -25695,7 +25648,7 @@
                       <m:sSubPr>
                         <m:ctrlPr>
                           <a:rPr lang="en-US" b="0" i="1" smtClean="0">
-                            <a:latin typeface="Cambria Math" panose="02040503050406030204" pitchFamily="18" charset="0"/>
+                            <a:latin typeface="Cambria Math"/>
                           </a:rPr>
                         </m:ctrlPr>
                       </m:sSubPr>
@@ -25720,7 +25673,7 @@
                       <m:sSubPr>
                         <m:ctrlPr>
                           <a:rPr lang="en-US" b="0" i="1" smtClean="0">
-                            <a:latin typeface="Cambria Math" panose="02040503050406030204" pitchFamily="18" charset="0"/>
+                            <a:latin typeface="Cambria Math"/>
                           </a:rPr>
                         </m:ctrlPr>
                       </m:sSubPr>
@@ -25759,8 +25712,8 @@
                     <m:sSub>
                       <m:sSubPr>
                         <m:ctrlPr>
-                          <a:rPr lang="en-US" i="1" smtClean="0">
-                            <a:latin typeface="Cambria Math" panose="02040503050406030204" pitchFamily="18" charset="0"/>
+                          <a:rPr lang="en-US" b="0" i="1" smtClean="0">
+                            <a:latin typeface="Cambria Math"/>
                           </a:rPr>
                         </m:ctrlPr>
                       </m:sSubPr>
